--- a/vector-legal-01-obsidian-neon.pptx
+++ b/vector-legal-01-obsidian-neon.pptx
@@ -3588,7 +3588,7 @@
                 </a:solidFill>
                 <a:latin typeface="Inter Display"/>
               </a:rPr>
-              <a:t>167</a:t>
+              <a:t>168</a:t>
             </a:r>
           </a:p>
         </p:txBody>
@@ -3857,7 +3857,7 @@
                 </a:solidFill>
                 <a:latin typeface="Inter"/>
               </a:rPr>
-              <a:t>Адаптация из anthropics/claude-for-legal · Apache-2.0</a:t>
+              <a:t>Адаптация anthropics/claude-for-legal (Apache-2.0) · код — MIT</a:t>
             </a:r>
           </a:p>
         </p:txBody>
@@ -5158,8 +5158,8 @@
         </p:nvSpPr>
         <p:spPr>
           <a:xfrm>
-            <a:off x="8778240" y="6528816"/>
-            <a:ext cx="2834640" cy="228600"/>
+            <a:off x="7498079" y="6528816"/>
+            <a:ext cx="4114800" cy="228600"/>
           </a:xfrm>
           <a:prstGeom prst="rect">
             <a:avLst/>
@@ -6082,8 +6082,8 @@
         </p:nvSpPr>
         <p:spPr>
           <a:xfrm>
-            <a:off x="8778240" y="6528816"/>
-            <a:ext cx="2834640" cy="228600"/>
+            <a:off x="7498079" y="6528816"/>
+            <a:ext cx="4114800" cy="228600"/>
           </a:xfrm>
           <a:prstGeom prst="rect">
             <a:avLst/>
@@ -6306,7 +6306,7 @@
                 </a:solidFill>
                 <a:latin typeface="Inter"/>
               </a:rPr>
-              <a:t>12 плагинов · 167 навыков · адаптация claude-for-legal под право РФ</a:t>
+              <a:t>12 плагинов · 168 навыков · адаптация claude-for-legal под право РФ</a:t>
             </a:r>
           </a:p>
         </p:txBody>
@@ -6420,7 +6420,7 @@
                 </a:solidFill>
                 <a:latin typeface="Inter"/>
               </a:rPr>
-              <a:t>Apache-2.0 · структурная база: anthropics/claude-for-legal (Anthropic)</a:t>
+              <a:t>MIT · структурная база: anthropics/claude-for-legal (Anthropic, Apache-2.0)</a:t>
             </a:r>
           </a:p>
         </p:txBody>
@@ -7659,7 +7659,7 @@
                 </a:solidFill>
                 <a:latin typeface="Inter"/>
               </a:rPr>
-              <a:t>Адаптация (Osmosy, Apache-2.0) — русское право + Hermes Agent + расширения:</a:t>
+              <a:t>Адаптация (Osmosy, MIT) — русское право + Hermes Agent + расширения:</a:t>
             </a:r>
           </a:p>
         </p:txBody>
@@ -7742,8 +7742,8 @@
         </p:nvSpPr>
         <p:spPr>
           <a:xfrm>
-            <a:off x="8778240" y="6528816"/>
-            <a:ext cx="2834640" cy="228600"/>
+            <a:off x="7498079" y="6528816"/>
+            <a:ext cx="4114800" cy="228600"/>
           </a:xfrm>
           <a:prstGeom prst="rect">
             <a:avLst/>
@@ -9228,8 +9228,8 @@
         </p:nvSpPr>
         <p:spPr>
           <a:xfrm>
-            <a:off x="8778240" y="6528816"/>
-            <a:ext cx="2834640" cy="228600"/>
+            <a:off x="7498079" y="6528816"/>
+            <a:ext cx="4114800" cy="228600"/>
           </a:xfrm>
           <a:prstGeom prst="rect">
             <a:avLst/>
@@ -10444,8 +10444,8 @@
         </p:nvSpPr>
         <p:spPr>
           <a:xfrm>
-            <a:off x="8778240" y="6528816"/>
-            <a:ext cx="2834640" cy="228600"/>
+            <a:off x="7498079" y="6528816"/>
+            <a:ext cx="4114800" cy="228600"/>
           </a:xfrm>
           <a:prstGeom prst="rect">
             <a:avLst/>
@@ -11739,8 +11739,8 @@
         </p:nvSpPr>
         <p:spPr>
           <a:xfrm>
-            <a:off x="8778240" y="6528816"/>
-            <a:ext cx="2834640" cy="228600"/>
+            <a:off x="7498079" y="6528816"/>
+            <a:ext cx="4114800" cy="228600"/>
           </a:xfrm>
           <a:prstGeom prst="rect">
             <a:avLst/>
@@ -12785,8 +12785,8 @@
         </p:nvSpPr>
         <p:spPr>
           <a:xfrm>
-            <a:off x="8778240" y="6528816"/>
-            <a:ext cx="2834640" cy="228600"/>
+            <a:off x="7498079" y="6528816"/>
+            <a:ext cx="4114800" cy="228600"/>
           </a:xfrm>
           <a:prstGeom prst="rect">
             <a:avLst/>
@@ -14141,8 +14141,8 @@
         </p:nvSpPr>
         <p:spPr>
           <a:xfrm>
-            <a:off x="8778240" y="6528816"/>
-            <a:ext cx="2834640" cy="228600"/>
+            <a:off x="7498079" y="6528816"/>
+            <a:ext cx="4114800" cy="228600"/>
           </a:xfrm>
           <a:prstGeom prst="rect">
             <a:avLst/>
@@ -15248,7 +15248,7 @@
                 </a:solidFill>
                 <a:latin typeface="Inter"/>
               </a:rPr>
-              <a:t>Без MCP все цитаты — [модель знания — проверь]</a:t>
+              <a:t>Без MCP все цитаты — [model knowledge — verify]</a:t>
             </a:r>
           </a:p>
         </p:txBody>
@@ -15331,8 +15331,8 @@
         </p:nvSpPr>
         <p:spPr>
           <a:xfrm>
-            <a:off x="8778240" y="6528816"/>
-            <a:ext cx="2834640" cy="228600"/>
+            <a:off x="7498079" y="6528816"/>
+            <a:ext cx="4114800" cy="228600"/>
           </a:xfrm>
           <a:prstGeom prst="rect">
             <a:avLst/>
@@ -16608,8 +16608,8 @@
         </p:nvSpPr>
         <p:spPr>
           <a:xfrm>
-            <a:off x="8778240" y="6528816"/>
-            <a:ext cx="2834640" cy="228600"/>
+            <a:off x="7498079" y="6528816"/>
+            <a:ext cx="4114800" cy="228600"/>
           </a:xfrm>
           <a:prstGeom prst="rect">
             <a:avLst/>

--- a/vector-legal-01-obsidian-neon.pptx
+++ b/vector-legal-01-obsidian-neon.pptx
@@ -3125,6 +3125,54 @@
       </p:pic>
       <p:sp>
         <p:nvSpPr>
+          <p:cNvPr id="21" name="Rounded Rectangle 20"/>
+          <p:cNvSpPr/>
+          <p:nvPr/>
+        </p:nvSpPr>
+        <p:spPr>
+          <a:xfrm>
+            <a:off x="3154679" y="5925312"/>
+            <a:ext cx="5888736" cy="384048"/>
+          </a:xfrm>
+          <a:prstGeom prst="roundRect">
+            <a:avLst>
+              <a:gd name="adj" fmla="val 50000"/>
+            </a:avLst>
+          </a:prstGeom>
+          <a:solidFill>
+            <a:srgbClr val="0B1220">
+              <a:alpha val="97000"/>
+            </a:srgbClr>
+          </a:solidFill>
+          <a:ln>
+            <a:noFill/>
+          </a:ln>
+          <a:effectLst/>
+        </p:spPr>
+        <p:style>
+          <a:lnRef idx="1">
+            <a:schemeClr val="accent1"/>
+          </a:lnRef>
+          <a:fillRef idx="3">
+            <a:schemeClr val="accent1"/>
+          </a:fillRef>
+          <a:effectRef idx="2">
+            <a:schemeClr val="accent1"/>
+          </a:effectRef>
+          <a:fontRef idx="minor">
+            <a:schemeClr val="lt1"/>
+          </a:fontRef>
+        </p:style>
+        <p:txBody>
+          <a:bodyPr rtlCol="0" anchor="ctr"/>
+          <a:lstStyle/>
+          <a:p>
+            <a:pPr algn="ctr"/>
+          </a:p>
+        </p:txBody>
+      </p:sp>
+      <p:sp>
+        <p:nvSpPr>
           <p:cNvPr id="3" name="Rectangle 2"/>
           <p:cNvSpPr/>
           <p:nvPr/>
@@ -3829,7 +3877,7 @@
       </p:sp>
       <p:sp>
         <p:nvSpPr>
-          <p:cNvPr id="21" name="TextBox 20"/>
+          <p:cNvPr id="22" name="TextBox 21"/>
           <p:cNvSpPr txBox="1"/>
           <p:nvPr/>
         </p:nvSpPr>
@@ -3864,7 +3912,7 @@
       </p:sp>
       <p:sp>
         <p:nvSpPr>
-          <p:cNvPr id="22" name="TextBox 21"/>
+          <p:cNvPr id="23" name="TextBox 22"/>
           <p:cNvSpPr txBox="1"/>
           <p:nvPr/>
         </p:nvSpPr>

--- a/vector-legal-01-obsidian-neon.pptx
+++ b/vector-legal-01-obsidian-neon.pptx
@@ -3125,6 +3125,54 @@
       </p:pic>
       <p:sp>
         <p:nvSpPr>
+          <p:cNvPr id="23" name="Rounded Rectangle 22"/>
+          <p:cNvSpPr/>
+          <p:nvPr/>
+        </p:nvSpPr>
+        <p:spPr>
+          <a:xfrm>
+            <a:off x="4251960" y="6245352"/>
+            <a:ext cx="3694176" cy="365760"/>
+          </a:xfrm>
+          <a:prstGeom prst="roundRect">
+            <a:avLst>
+              <a:gd name="adj" fmla="val 50000"/>
+            </a:avLst>
+          </a:prstGeom>
+          <a:solidFill>
+            <a:srgbClr val="0B1220">
+              <a:alpha val="97000"/>
+            </a:srgbClr>
+          </a:solidFill>
+          <a:ln>
+            <a:noFill/>
+          </a:ln>
+          <a:effectLst/>
+        </p:spPr>
+        <p:style>
+          <a:lnRef idx="1">
+            <a:schemeClr val="accent1"/>
+          </a:lnRef>
+          <a:fillRef idx="3">
+            <a:schemeClr val="accent1"/>
+          </a:fillRef>
+          <a:effectRef idx="2">
+            <a:schemeClr val="accent1"/>
+          </a:effectRef>
+          <a:fontRef idx="minor">
+            <a:schemeClr val="lt1"/>
+          </a:fontRef>
+        </p:style>
+        <p:txBody>
+          <a:bodyPr rtlCol="0" anchor="ctr"/>
+          <a:lstStyle/>
+          <a:p>
+            <a:pPr algn="ctr"/>
+          </a:p>
+        </p:txBody>
+      </p:sp>
+      <p:sp>
+        <p:nvSpPr>
           <p:cNvPr id="21" name="Rounded Rectangle 20"/>
           <p:cNvSpPr/>
           <p:nvPr/>
@@ -3912,7 +3960,7 @@
       </p:sp>
       <p:sp>
         <p:nvSpPr>
-          <p:cNvPr id="23" name="TextBox 22"/>
+          <p:cNvPr id="24" name="TextBox 23"/>
           <p:cNvSpPr txBox="1"/>
           <p:nvPr/>
         </p:nvSpPr>

--- a/vector-legal-01-obsidian-neon.pptx
+++ b/vector-legal-01-obsidian-neon.pptx
@@ -3993,6 +3993,30 @@
           </a:p>
         </p:txBody>
       </p:sp>
+      <p:pic>
+        <p:nvPicPr>
+          <p:cNvPr id="25" name="Picture 24" descr="vector_ray_t.png"/>
+          <p:cNvPicPr>
+            <a:picLocks noChangeAspect="1"/>
+          </p:cNvPicPr>
+          <p:nvPr/>
+        </p:nvPicPr>
+        <p:blipFill>
+          <a:blip r:embed="rId3"/>
+          <a:stretch>
+            <a:fillRect/>
+          </a:stretch>
+        </p:blipFill>
+        <p:spPr>
+          <a:xfrm>
+            <a:off x="11155680" y="274320"/>
+            <a:ext cx="822960" cy="582402"/>
+          </a:xfrm>
+          <a:prstGeom prst="rect">
+            <a:avLst/>
+          </a:prstGeom>
+        </p:spPr>
+      </p:pic>
     </p:spTree>
   </p:cSld>
   <p:clrMapOvr>
